--- a/slides/_extensions/nexer/nexer-reference.pptx
+++ b/slides/_extensions/nexer/nexer-reference.pptx
@@ -3490,10 +3490,10 @@
         <a:srgbClr val="C8C8C8"/>
       </a:accent6>
       <a:hlink>
-        <a:srgbClr val="FFFFFF"/>
+        <a:srgbClr val="5A1F9F"/>
       </a:hlink>
       <a:folHlink>
-        <a:srgbClr val="5A1F9F"/>
+        <a:srgbClr val="AA4BF4"/>
       </a:folHlink>
     </a:clrScheme>
     <a:fontScheme name="Nexer fonts">
